--- a/public/study/cse513/downloads/week-06.pptx
+++ b/public/study/cse513/downloads/week-06.pptx
@@ -3364,7 +3364,7 @@
           <a:lstStyle xmlns:a="http://schemas.openxmlformats.org/drawingml/2006/main"/>
           <a:p xmlns:a="http://schemas.openxmlformats.org/drawingml/2006/main">
             <a:r>
-              <a:t>VA region ve erişim izni denetlenir. Geçerli nonresident page için frame bulunur; gerekirse victim seçimi, backing I/O, zero fill veya COW işlemi yapılır. PTE/TLB coherence sağlanır ve faulting instruction tekrar yürütülür. I/O sırasında görev bloklanabilir; kernel entry tek başına başka task seçimini zorunlu kılmaz.</a:t>
+              <a:t>VA region ve erişimin geçerliliği denetlenir. Geçerli fakat nonresident page için frame bulunur; gerekirse victim seçimi, backing I/O veya zero fill ile içerik hazırlanır. Resident bir COW sayfasına yazma da fault oluşturabilir: gerektiğinde özel kopya hazırlanır ve izinler güncellenir. PTE/TLB coherence sağlanır ve faulting instruction tekrar yürütülür. I/O sırasında görev bloklanabilir; kernel entry tek başına başka task seçimini zorunlu kılmaz.</a:t>
             </a:r>
           </a:p>
           <a:p xmlns:a="http://schemas.openxmlformats.org/drawingml/2006/main">
@@ -16118,7 +16118,7 @@
                 <a:ea typeface="Helvetica Neue"/>
                 <a:cs typeface="Helvetica Neue"/>
               </a:rPr>
-              <a:t>Düşün: On page fault on disk read kanıtı mı?</a:t>
+              <a:t>Düşün: On sayfa hatası, on disk okumasının kanıtı mı?</a:t>
             </a:r>
           </a:p>
         </p:txBody>
